--- a/docs/lectures/in-class_activities/class_26.pptx
+++ b/docs/lectures/in-class_activities/class_26.pptx
@@ -11,9 +11,9 @@
     <p:sldId id="480" r:id="rId2"/>
     <p:sldId id="723" r:id="rId3"/>
     <p:sldId id="1587" r:id="rId4"/>
-    <p:sldId id="1815" r:id="rId5"/>
+    <p:sldId id="1818" r:id="rId5"/>
     <p:sldId id="1816" r:id="rId6"/>
-    <p:sldId id="1817" r:id="rId7"/>
+    <p:sldId id="1819" r:id="rId7"/>
     <p:sldId id="1814" r:id="rId8"/>
   </p:sldIdLst>
   <p:sldSz cx="12192000" cy="6858000"/>
@@ -203,7 +203,7 @@
           <a:p>
             <a:fld id="{6AC7DB66-C6D6-B24E-B345-FA3772C924EA}" type="datetimeFigureOut">
               <a:rPr lang="en-US" smtClean="0"/>
-              <a:t>12/8/21</a:t>
+              <a:t>12/3/25</a:t>
             </a:fld>
             <a:endParaRPr lang="en-US"/>
           </a:p>
@@ -768,13 +768,15 @@
           <a:p>
             <a:r>
               <a:rPr lang="en-US"/>
-              <a:t>What is one thing that you can do to help address NTDs in the developing world?</a:t>
-            </a:r>
-          </a:p>
-          <a:p>
-            <a:r>
-              <a:rPr lang="en-US"/>
-              <a:t>https://www.polleverywhere.com/discourses/62Kj9DbtjAqIwYQE02rDx</a:t>
+              <a:t>Do not modify the notes in this section to avoid tampering with the Poll Everywhere activity.
+More info at polleverywhere.com/support
+What is one thing that you can do to help address NTDs in the developing world?</a:t>
+            </a:r>
+          </a:p>
+          <a:p>
+            <a:r>
+              <a:rPr lang="en-US"/>
+              <a:t>https://www.polleverywhere.com/discourses/xeWFRNguYVqKG9D7X8qVM</a:t>
             </a:r>
           </a:p>
         </p:txBody>
@@ -805,7 +807,7 @@
     </p:spTree>
     <p:extLst>
       <p:ext uri="{BB962C8B-B14F-4D97-AF65-F5344CB8AC3E}">
-        <p14:creationId xmlns:p14="http://schemas.microsoft.com/office/powerpoint/2010/main" val="2715096280"/>
+        <p14:creationId xmlns:p14="http://schemas.microsoft.com/office/powerpoint/2010/main" val="544517307"/>
       </p:ext>
     </p:extLst>
   </p:cSld>
@@ -945,13 +947,15 @@
           <a:p>
             <a:r>
               <a:rPr lang="en-US"/>
-              <a:t>What is the FISH 406 concept that you were most excited to learn?</a:t>
-            </a:r>
-          </a:p>
-          <a:p>
-            <a:r>
-              <a:rPr lang="en-US"/>
-              <a:t>https://www.polleverywhere.com/discourses/nm5Ont5j3D4ZRdZR8xwmM</a:t>
+              <a:t>Do not modify the notes in this section to avoid tampering with the Poll Everywhere activity.
+More info at polleverywhere.com/support
+What is the FISH 406 concept that you were most excited to learn?</a:t>
+            </a:r>
+          </a:p>
+          <a:p>
+            <a:r>
+              <a:rPr lang="en-US"/>
+              <a:t>https://www.polleverywhere.com/discourses/NG1y0Rz3tDD6uLCE2FzZz</a:t>
             </a:r>
           </a:p>
         </p:txBody>
@@ -982,7 +986,7 @@
     </p:spTree>
     <p:extLst>
       <p:ext uri="{BB962C8B-B14F-4D97-AF65-F5344CB8AC3E}">
-        <p14:creationId xmlns:p14="http://schemas.microsoft.com/office/powerpoint/2010/main" val="4195998849"/>
+        <p14:creationId xmlns:p14="http://schemas.microsoft.com/office/powerpoint/2010/main" val="3891403358"/>
       </p:ext>
     </p:extLst>
   </p:cSld>
@@ -1223,7 +1227,7 @@
           <a:p>
             <a:fld id="{21DDE3A9-9D48-7D40-AF95-520AE186EA5D}" type="datetimeFigureOut">
               <a:rPr lang="en-US" smtClean="0"/>
-              <a:t>12/8/21</a:t>
+              <a:t>12/3/25</a:t>
             </a:fld>
             <a:endParaRPr lang="en-US"/>
           </a:p>
@@ -1421,7 +1425,7 @@
           <a:p>
             <a:fld id="{21DDE3A9-9D48-7D40-AF95-520AE186EA5D}" type="datetimeFigureOut">
               <a:rPr lang="en-US" smtClean="0"/>
-              <a:t>12/8/21</a:t>
+              <a:t>12/3/25</a:t>
             </a:fld>
             <a:endParaRPr lang="en-US"/>
           </a:p>
@@ -1629,7 +1633,7 @@
           <a:p>
             <a:fld id="{21DDE3A9-9D48-7D40-AF95-520AE186EA5D}" type="datetimeFigureOut">
               <a:rPr lang="en-US" smtClean="0"/>
-              <a:t>12/8/21</a:t>
+              <a:t>12/3/25</a:t>
             </a:fld>
             <a:endParaRPr lang="en-US"/>
           </a:p>
@@ -1827,7 +1831,7 @@
           <a:p>
             <a:fld id="{21DDE3A9-9D48-7D40-AF95-520AE186EA5D}" type="datetimeFigureOut">
               <a:rPr lang="en-US" smtClean="0"/>
-              <a:t>12/8/21</a:t>
+              <a:t>12/3/25</a:t>
             </a:fld>
             <a:endParaRPr lang="en-US"/>
           </a:p>
@@ -2102,7 +2106,7 @@
           <a:p>
             <a:fld id="{21DDE3A9-9D48-7D40-AF95-520AE186EA5D}" type="datetimeFigureOut">
               <a:rPr lang="en-US" smtClean="0"/>
-              <a:t>12/8/21</a:t>
+              <a:t>12/3/25</a:t>
             </a:fld>
             <a:endParaRPr lang="en-US"/>
           </a:p>
@@ -2367,7 +2371,7 @@
           <a:p>
             <a:fld id="{21DDE3A9-9D48-7D40-AF95-520AE186EA5D}" type="datetimeFigureOut">
               <a:rPr lang="en-US" smtClean="0"/>
-              <a:t>12/8/21</a:t>
+              <a:t>12/3/25</a:t>
             </a:fld>
             <a:endParaRPr lang="en-US"/>
           </a:p>
@@ -2779,7 +2783,7 @@
           <a:p>
             <a:fld id="{21DDE3A9-9D48-7D40-AF95-520AE186EA5D}" type="datetimeFigureOut">
               <a:rPr lang="en-US" smtClean="0"/>
-              <a:t>12/8/21</a:t>
+              <a:t>12/3/25</a:t>
             </a:fld>
             <a:endParaRPr lang="en-US"/>
           </a:p>
@@ -2920,7 +2924,7 @@
           <a:p>
             <a:fld id="{21DDE3A9-9D48-7D40-AF95-520AE186EA5D}" type="datetimeFigureOut">
               <a:rPr lang="en-US" smtClean="0"/>
-              <a:t>12/8/21</a:t>
+              <a:t>12/3/25</a:t>
             </a:fld>
             <a:endParaRPr lang="en-US"/>
           </a:p>
@@ -3033,7 +3037,7 @@
           <a:p>
             <a:fld id="{21DDE3A9-9D48-7D40-AF95-520AE186EA5D}" type="datetimeFigureOut">
               <a:rPr lang="en-US" smtClean="0"/>
-              <a:t>12/8/21</a:t>
+              <a:t>12/3/25</a:t>
             </a:fld>
             <a:endParaRPr lang="en-US"/>
           </a:p>
@@ -3344,7 +3348,7 @@
           <a:p>
             <a:fld id="{21DDE3A9-9D48-7D40-AF95-520AE186EA5D}" type="datetimeFigureOut">
               <a:rPr lang="en-US" smtClean="0"/>
-              <a:t>12/8/21</a:t>
+              <a:t>12/3/25</a:t>
             </a:fld>
             <a:endParaRPr lang="en-US"/>
           </a:p>
@@ -3632,7 +3636,7 @@
           <a:p>
             <a:fld id="{21DDE3A9-9D48-7D40-AF95-520AE186EA5D}" type="datetimeFigureOut">
               <a:rPr lang="en-US" smtClean="0"/>
-              <a:t>12/8/21</a:t>
+              <a:t>12/3/25</a:t>
             </a:fld>
             <a:endParaRPr lang="en-US"/>
           </a:p>
@@ -3873,7 +3877,7 @@
           <a:p>
             <a:fld id="{21DDE3A9-9D48-7D40-AF95-520AE186EA5D}" type="datetimeFigureOut">
               <a:rPr lang="en-US" smtClean="0"/>
-              <a:t>12/8/21</a:t>
+              <a:t>12/3/25</a:t>
             </a:fld>
             <a:endParaRPr lang="en-US"/>
           </a:p>
@@ -4309,7 +4313,7 @@
         <p:spPr bwMode="auto">
           <a:xfrm>
             <a:off x="352524" y="2644170"/>
-            <a:ext cx="10896600" cy="1569660"/>
+            <a:ext cx="10896600" cy="830997"/>
           </a:xfrm>
           <a:prstGeom prst="rect">
             <a:avLst/>
@@ -4342,7 +4346,7 @@
                 <a:latin typeface="Avenir Book" panose="02000503020000020003" pitchFamily="2" charset="0"/>
                 <a:cs typeface="Avenir"/>
               </a:rPr>
-              <a:t>Practical session 26</a:t>
+              <a:t>Class 26</a:t>
             </a:r>
             <a:r>
               <a:rPr lang="en-US" sz="4800" dirty="0">
@@ -4947,7 +4951,7 @@
           <p:cNvPr id="2" name="Title 1">
             <a:extLst>
               <a:ext uri="{FF2B5EF4-FFF2-40B4-BE49-F238E27FC236}">
-                <a16:creationId xmlns:a16="http://schemas.microsoft.com/office/drawing/2014/main" id="{2821BDA4-B299-134A-8380-FA24EB613AD1}"/>
+                <a16:creationId xmlns:a16="http://schemas.microsoft.com/office/drawing/2014/main" id="{CB405F38-F1CD-C4F1-121D-436AAAABA0B8}"/>
               </a:ext>
             </a:extLst>
           </p:cNvPr>
@@ -4972,7 +4976,7 @@
           <p:cNvPr id="3" name="Subtitle 2">
             <a:extLst>
               <a:ext uri="{FF2B5EF4-FFF2-40B4-BE49-F238E27FC236}">
-                <a16:creationId xmlns:a16="http://schemas.microsoft.com/office/drawing/2014/main" id="{D8F038C2-A91C-A649-8A20-2559CED3BA93}"/>
+                <a16:creationId xmlns:a16="http://schemas.microsoft.com/office/drawing/2014/main" id="{547AE950-44FF-A722-7373-5C417F470894}"/>
               </a:ext>
             </a:extLst>
           </p:cNvPr>
@@ -4994,10 +4998,10 @@
       </p:sp>
       <p:pic>
         <p:nvPicPr>
-          <p:cNvPr id="5" name="slide.url=https://www.polleverywhere.com/discourses/62Kj9DbtjAqIwYQE02rDx">
-            <a:extLst>
-              <a:ext uri="{FF2B5EF4-FFF2-40B4-BE49-F238E27FC236}">
-                <a16:creationId xmlns:a16="http://schemas.microsoft.com/office/drawing/2014/main" id="{5030ECE5-E5D9-FF4A-AE13-17D910BCA3C7}"/>
+          <p:cNvPr id="5" name="slide.url=https://www.polleverywhere.com/discourses/xeWFRNguYVqKG9D7X8qVM">
+            <a:extLst>
+              <a:ext uri="{FF2B5EF4-FFF2-40B4-BE49-F238E27FC236}">
+                <a16:creationId xmlns:a16="http://schemas.microsoft.com/office/drawing/2014/main" id="{061ECD7B-486E-0517-A20D-74C3D72AFEC9}"/>
               </a:ext>
             </a:extLst>
           </p:cNvPr>
@@ -5025,7 +5029,7 @@
     </p:spTree>
     <p:extLst>
       <p:ext uri="{BB962C8B-B14F-4D97-AF65-F5344CB8AC3E}">
-        <p14:creationId xmlns:p14="http://schemas.microsoft.com/office/powerpoint/2010/main" val="747959157"/>
+        <p14:creationId xmlns:p14="http://schemas.microsoft.com/office/powerpoint/2010/main" val="3900991855"/>
       </p:ext>
     </p:extLst>
   </p:cSld>
@@ -5161,7 +5165,7 @@
           <p:cNvPr id="2" name="Title 1">
             <a:extLst>
               <a:ext uri="{FF2B5EF4-FFF2-40B4-BE49-F238E27FC236}">
-                <a16:creationId xmlns:a16="http://schemas.microsoft.com/office/drawing/2014/main" id="{7B2C2C1B-54C7-2448-AC55-DE7B328C6848}"/>
+                <a16:creationId xmlns:a16="http://schemas.microsoft.com/office/drawing/2014/main" id="{97BC0CE3-143D-7337-74B4-5E2051D02D20}"/>
               </a:ext>
             </a:extLst>
           </p:cNvPr>
@@ -5186,7 +5190,7 @@
           <p:cNvPr id="3" name="Subtitle 2">
             <a:extLst>
               <a:ext uri="{FF2B5EF4-FFF2-40B4-BE49-F238E27FC236}">
-                <a16:creationId xmlns:a16="http://schemas.microsoft.com/office/drawing/2014/main" id="{E636DC21-68CB-4242-8EDF-1C2E61696943}"/>
+                <a16:creationId xmlns:a16="http://schemas.microsoft.com/office/drawing/2014/main" id="{1AB13A23-BC3C-8B5C-EE17-2CE338579CAD}"/>
               </a:ext>
             </a:extLst>
           </p:cNvPr>
@@ -5208,10 +5212,10 @@
       </p:sp>
       <p:pic>
         <p:nvPicPr>
-          <p:cNvPr id="5" name="slide.url=https://www.polleverywhere.com/discourses/nm5Ont5j3D4ZRdZR8xwmM">
-            <a:extLst>
-              <a:ext uri="{FF2B5EF4-FFF2-40B4-BE49-F238E27FC236}">
-                <a16:creationId xmlns:a16="http://schemas.microsoft.com/office/drawing/2014/main" id="{36E02B75-9A81-0B45-801D-13EEA13CD062}"/>
+          <p:cNvPr id="5" name="slide.url=https://www.polleverywhere.com/discourses/NG1y0Rz3tDD6uLCE2FzZz">
+            <a:extLst>
+              <a:ext uri="{FF2B5EF4-FFF2-40B4-BE49-F238E27FC236}">
+                <a16:creationId xmlns:a16="http://schemas.microsoft.com/office/drawing/2014/main" id="{F99E6AAA-0A76-EEE4-BC3D-4C6BC5E3826F}"/>
               </a:ext>
             </a:extLst>
           </p:cNvPr>
@@ -5239,7 +5243,7 @@
     </p:spTree>
     <p:extLst>
       <p:ext uri="{BB962C8B-B14F-4D97-AF65-F5344CB8AC3E}">
-        <p14:creationId xmlns:p14="http://schemas.microsoft.com/office/powerpoint/2010/main" val="3380276662"/>
+        <p14:creationId xmlns:p14="http://schemas.microsoft.com/office/powerpoint/2010/main" val="1937104110"/>
       </p:ext>
     </p:extLst>
   </p:cSld>
@@ -5285,7 +5289,7 @@
         <p:spPr bwMode="auto">
           <a:xfrm>
             <a:off x="352524" y="2644170"/>
-            <a:ext cx="10896600" cy="1569660"/>
+            <a:ext cx="10896600" cy="830997"/>
           </a:xfrm>
           <a:prstGeom prst="rect">
             <a:avLst/>
@@ -5318,7 +5322,7 @@
                 <a:latin typeface="Avenir Book" panose="02000503020000020003" pitchFamily="2" charset="0"/>
                 <a:cs typeface="Avenir"/>
               </a:rPr>
-              <a:t>Practical session 26</a:t>
+              <a:t>Class 26</a:t>
             </a:r>
             <a:r>
               <a:rPr lang="en-US" sz="4800" dirty="0">
